--- a/reports/weekly_report_2026-06-08_2026-06-14.pptx
+++ b/reports/weekly_report_2026-06-08_2026-06-14.pptx
@@ -13,6 +13,7 @@
     <p:sldId id="261" r:id="rId12"/>
     <p:sldId id="262" r:id="rId13"/>
     <p:sldId id="263" r:id="rId14"/>
+    <p:sldId id="264" r:id="rId15"/>
   </p:sldIdLst>
   <p:sldSz cx="12188952" cy="6858000" type="screen4x3"/>
   <p:notesSz cx="6858000" cy="9144000"/>
@@ -10902,6 +10903,662 @@
                 </a:solidFill>
               </a:rPr>
               <a:t>　（記録なし）</a:t>
+            </a:r>
+          </a:p>
+        </p:txBody>
+      </p:sp>
+    </p:spTree>
+  </p:cSld>
+  <p:clrMapOvr>
+    <a:masterClrMapping/>
+  </p:clrMapOvr>
+</p:sld>
+</file>
+
+<file path=ppt/slides/slide9.xml><?xml version="1.0" encoding="utf-8"?>
+<p:sld xmlns:a="http://schemas.openxmlformats.org/drawingml/2006/main" xmlns:p="http://schemas.openxmlformats.org/presentationml/2006/main" xmlns:r="http://schemas.openxmlformats.org/officeDocument/2006/relationships">
+  <p:cSld>
+    <p:bg>
+      <p:bgPr>
+        <a:solidFill>
+          <a:srgbClr val="1A1A2E"/>
+        </a:solidFill>
+        <a:effectLst/>
+      </p:bgPr>
+    </p:bg>
+    <p:spTree>
+      <p:nvGrpSpPr>
+        <p:cNvPr id="1" name=""/>
+        <p:cNvGrpSpPr/>
+        <p:nvPr/>
+      </p:nvGrpSpPr>
+      <p:grpSpPr/>
+      <p:sp>
+        <p:nvSpPr>
+          <p:cNvPr id="2" name="Rectangle 1"/>
+          <p:cNvSpPr/>
+          <p:nvPr/>
+        </p:nvSpPr>
+        <p:spPr>
+          <a:xfrm>
+            <a:off x="0" y="0"/>
+            <a:ext cx="12188952" cy="45720"/>
+          </a:xfrm>
+          <a:prstGeom prst="rect">
+            <a:avLst/>
+          </a:prstGeom>
+          <a:solidFill>
+            <a:srgbClr val="E89C45"/>
+          </a:solidFill>
+          <a:ln>
+            <a:noFill/>
+          </a:ln>
+        </p:spPr>
+        <p:style>
+          <a:lnRef idx="1">
+            <a:schemeClr val="accent1"/>
+          </a:lnRef>
+          <a:fillRef idx="3">
+            <a:schemeClr val="accent1"/>
+          </a:fillRef>
+          <a:effectRef idx="2">
+            <a:schemeClr val="accent1"/>
+          </a:effectRef>
+          <a:fontRef idx="minor">
+            <a:schemeClr val="lt1"/>
+          </a:fontRef>
+        </p:style>
+        <p:txBody>
+          <a:bodyPr rtlCol="0" anchor="ctr"/>
+          <a:lstStyle/>
+          <a:p>
+            <a:pPr algn="ctr"/>
+          </a:p>
+        </p:txBody>
+      </p:sp>
+      <p:sp>
+        <p:nvSpPr>
+          <p:cNvPr id="3" name="Rectangle 2"/>
+          <p:cNvSpPr/>
+          <p:nvPr/>
+        </p:nvSpPr>
+        <p:spPr>
+          <a:xfrm>
+            <a:off x="0" y="45720"/>
+            <a:ext cx="12188952" cy="685800"/>
+          </a:xfrm>
+          <a:prstGeom prst="rect">
+            <a:avLst/>
+          </a:prstGeom>
+          <a:solidFill>
+            <a:srgbClr val="2D2D44"/>
+          </a:solidFill>
+          <a:ln>
+            <a:noFill/>
+          </a:ln>
+        </p:spPr>
+        <p:style>
+          <a:lnRef idx="1">
+            <a:schemeClr val="accent1"/>
+          </a:lnRef>
+          <a:fillRef idx="3">
+            <a:schemeClr val="accent1"/>
+          </a:fillRef>
+          <a:effectRef idx="2">
+            <a:schemeClr val="accent1"/>
+          </a:effectRef>
+          <a:fontRef idx="minor">
+            <a:schemeClr val="lt1"/>
+          </a:fontRef>
+        </p:style>
+        <p:txBody>
+          <a:bodyPr rtlCol="0" anchor="ctr"/>
+          <a:lstStyle/>
+          <a:p>
+            <a:pPr algn="ctr"/>
+          </a:p>
+        </p:txBody>
+      </p:sp>
+      <p:sp>
+        <p:nvSpPr>
+          <p:cNvPr id="4" name="TextBox 3"/>
+          <p:cNvSpPr txBox="1"/>
+          <p:nvPr/>
+        </p:nvSpPr>
+        <p:spPr>
+          <a:xfrm>
+            <a:off x="365760" y="91440"/>
+            <a:ext cx="9144000" cy="548640"/>
+          </a:xfrm>
+          <a:prstGeom prst="rect">
+            <a:avLst/>
+          </a:prstGeom>
+          <a:noFill/>
+        </p:spPr>
+        <p:txBody>
+          <a:bodyPr wrap="square">
+            <a:spAutoFit/>
+          </a:bodyPr>
+          <a:lstStyle/>
+          <a:p>
+            <a:pPr algn="l"/>
+            <a:r>
+              <a:rPr sz="2200" b="1">
+                <a:solidFill>
+                  <a:srgbClr val="FFFFFF"/>
+                </a:solidFill>
+              </a:rPr>
+              <a:t>💡 今週の事業アイデア｜肉酒場 然 への活用</a:t>
+            </a:r>
+          </a:p>
+        </p:txBody>
+      </p:sp>
+      <p:sp>
+        <p:nvSpPr>
+          <p:cNvPr id="5" name="TextBox 4"/>
+          <p:cNvSpPr txBox="1"/>
+          <p:nvPr/>
+        </p:nvSpPr>
+        <p:spPr>
+          <a:xfrm>
+            <a:off x="10058400" y="164592"/>
+            <a:ext cx="1828800" cy="411480"/>
+          </a:xfrm>
+          <a:prstGeom prst="rect">
+            <a:avLst/>
+          </a:prstGeom>
+          <a:noFill/>
+        </p:spPr>
+        <p:txBody>
+          <a:bodyPr wrap="square">
+            <a:spAutoFit/>
+          </a:bodyPr>
+          <a:lstStyle/>
+          <a:p>
+            <a:pPr algn="r"/>
+            <a:r>
+              <a:rPr sz="1100" b="0">
+                <a:solidFill>
+                  <a:srgbClr val="E89C45"/>
+                </a:solidFill>
+              </a:rPr>
+              <a:t>06/08〜06/14</a:t>
+            </a:r>
+          </a:p>
+        </p:txBody>
+      </p:sp>
+      <p:sp>
+        <p:nvSpPr>
+          <p:cNvPr id="6" name="Rectangle 5"/>
+          <p:cNvSpPr/>
+          <p:nvPr/>
+        </p:nvSpPr>
+        <p:spPr>
+          <a:xfrm>
+            <a:off x="320040" y="868680"/>
+            <a:ext cx="3739896" cy="5806440"/>
+          </a:xfrm>
+          <a:prstGeom prst="rect">
+            <a:avLst/>
+          </a:prstGeom>
+          <a:solidFill>
+            <a:srgbClr val="2D2D44"/>
+          </a:solidFill>
+          <a:ln>
+            <a:noFill/>
+          </a:ln>
+        </p:spPr>
+        <p:style>
+          <a:lnRef idx="1">
+            <a:schemeClr val="accent1"/>
+          </a:lnRef>
+          <a:fillRef idx="3">
+            <a:schemeClr val="accent1"/>
+          </a:fillRef>
+          <a:effectRef idx="2">
+            <a:schemeClr val="accent1"/>
+          </a:effectRef>
+          <a:fontRef idx="minor">
+            <a:schemeClr val="lt1"/>
+          </a:fontRef>
+        </p:style>
+        <p:txBody>
+          <a:bodyPr rtlCol="0" anchor="ctr"/>
+          <a:lstStyle/>
+          <a:p>
+            <a:pPr algn="ctr"/>
+          </a:p>
+        </p:txBody>
+      </p:sp>
+      <p:sp>
+        <p:nvSpPr>
+          <p:cNvPr id="7" name="Rectangle 6"/>
+          <p:cNvSpPr/>
+          <p:nvPr/>
+        </p:nvSpPr>
+        <p:spPr>
+          <a:xfrm>
+            <a:off x="320040" y="868680"/>
+            <a:ext cx="36576" cy="5806440"/>
+          </a:xfrm>
+          <a:prstGeom prst="rect">
+            <a:avLst/>
+          </a:prstGeom>
+          <a:solidFill>
+            <a:srgbClr val="E89C45"/>
+          </a:solidFill>
+          <a:ln>
+            <a:noFill/>
+          </a:ln>
+        </p:spPr>
+        <p:style>
+          <a:lnRef idx="1">
+            <a:schemeClr val="accent1"/>
+          </a:lnRef>
+          <a:fillRef idx="3">
+            <a:schemeClr val="accent1"/>
+          </a:fillRef>
+          <a:effectRef idx="2">
+            <a:schemeClr val="accent1"/>
+          </a:effectRef>
+          <a:fontRef idx="minor">
+            <a:schemeClr val="lt1"/>
+          </a:fontRef>
+        </p:style>
+        <p:txBody>
+          <a:bodyPr rtlCol="0" anchor="ctr"/>
+          <a:lstStyle/>
+          <a:p>
+            <a:pPr algn="ctr"/>
+          </a:p>
+        </p:txBody>
+      </p:sp>
+      <p:sp>
+        <p:nvSpPr>
+          <p:cNvPr id="8" name="TextBox 7"/>
+          <p:cNvSpPr txBox="1"/>
+          <p:nvPr/>
+        </p:nvSpPr>
+        <p:spPr>
+          <a:xfrm>
+            <a:off x="429768" y="941832"/>
+            <a:ext cx="3557016" cy="274320"/>
+          </a:xfrm>
+          <a:prstGeom prst="rect">
+            <a:avLst/>
+          </a:prstGeom>
+          <a:noFill/>
+        </p:spPr>
+        <p:txBody>
+          <a:bodyPr wrap="square">
+            <a:spAutoFit/>
+          </a:bodyPr>
+          <a:lstStyle/>
+          <a:p>
+            <a:pPr algn="l"/>
+            <a:r>
+              <a:rPr sz="1100" b="1">
+                <a:solidFill>
+                  <a:srgbClr val="E89C45"/>
+                </a:solidFill>
+              </a:rPr>
+              <a:t>今週のキートレンド</a:t>
+            </a:r>
+          </a:p>
+        </p:txBody>
+      </p:sp>
+      <p:sp>
+        <p:nvSpPr>
+          <p:cNvPr id="9" name="TextBox 8"/>
+          <p:cNvSpPr txBox="1"/>
+          <p:nvPr/>
+        </p:nvSpPr>
+        <p:spPr>
+          <a:xfrm>
+            <a:off x="429768" y="1280160"/>
+            <a:ext cx="3557016" cy="5349240"/>
+          </a:xfrm>
+          <a:prstGeom prst="rect">
+            <a:avLst/>
+          </a:prstGeom>
+          <a:noFill/>
+        </p:spPr>
+        <p:txBody>
+          <a:bodyPr wrap="square">
+            <a:spAutoFit/>
+          </a:bodyPr>
+          <a:lstStyle/>
+          <a:p>
+            <a:pPr algn="l"/>
+            <a:r>
+              <a:rPr sz="900" b="0">
+                <a:solidFill>
+                  <a:srgbClr val="CCCCCC"/>
+                </a:solidFill>
+              </a:rPr>
+              <a:t>🍖 **胡椒餅（フーチャオビン）**：「四ツ谷一餅堂」などが火付け役となり、台湾老劉胡椒餅が吉
+🍖 **葱油拌麺（ツォンヨウバンミェン）**：シンプルだけどクセになる麺料理として、2026年
+🍖 **韓国海鮮メニュー（チュクミ・カンジャンケジャン）**：「チュクミ」「カンジャンケジャン
+🍖 **多様化する麺メニュー（スープパスタ・麻辣湯・ご当地麺）**：米の価格高騰が続く中、主食
+🧪 **麹（Koji）が世界的トレンドに**：ミシュランが示す2026年の食トレンドとして「時
+🧪 **発酵食品が2026年トレンド食材の第1位**：栄養士・管理栄養士200人へのアンケート
+🧪 **麹調味料・甘酒・サワードウの浸透**：健康志向からの腸活として、塩麹や醤油麹をはじめと
+📱 **TikTok＝新規発見の最強プラットフォーム化**：2026年現在、飲食店の新規発見に
+📱 **「Instagram発見→TikTok共感→LINE来店誘導」の三段階設計**：SNS</a:t>
+            </a:r>
+          </a:p>
+        </p:txBody>
+      </p:sp>
+      <p:sp>
+        <p:nvSpPr>
+          <p:cNvPr id="10" name="Rectangle 9"/>
+          <p:cNvSpPr/>
+          <p:nvPr/>
+        </p:nvSpPr>
+        <p:spPr>
+          <a:xfrm>
+            <a:off x="4224528" y="868680"/>
+            <a:ext cx="3739896" cy="5806440"/>
+          </a:xfrm>
+          <a:prstGeom prst="rect">
+            <a:avLst/>
+          </a:prstGeom>
+          <a:solidFill>
+            <a:srgbClr val="2D2D44"/>
+          </a:solidFill>
+          <a:ln>
+            <a:noFill/>
+          </a:ln>
+        </p:spPr>
+        <p:style>
+          <a:lnRef idx="1">
+            <a:schemeClr val="accent1"/>
+          </a:lnRef>
+          <a:fillRef idx="3">
+            <a:schemeClr val="accent1"/>
+          </a:fillRef>
+          <a:effectRef idx="2">
+            <a:schemeClr val="accent1"/>
+          </a:effectRef>
+          <a:fontRef idx="minor">
+            <a:schemeClr val="lt1"/>
+          </a:fontRef>
+        </p:style>
+        <p:txBody>
+          <a:bodyPr rtlCol="0" anchor="ctr"/>
+          <a:lstStyle/>
+          <a:p>
+            <a:pPr algn="ctr"/>
+          </a:p>
+        </p:txBody>
+      </p:sp>
+      <p:sp>
+        <p:nvSpPr>
+          <p:cNvPr id="11" name="Rectangle 10"/>
+          <p:cNvSpPr/>
+          <p:nvPr/>
+        </p:nvSpPr>
+        <p:spPr>
+          <a:xfrm>
+            <a:off x="4224528" y="868680"/>
+            <a:ext cx="36576" cy="5806440"/>
+          </a:xfrm>
+          <a:prstGeom prst="rect">
+            <a:avLst/>
+          </a:prstGeom>
+          <a:solidFill>
+            <a:srgbClr val="5BB86C"/>
+          </a:solidFill>
+          <a:ln>
+            <a:noFill/>
+          </a:ln>
+        </p:spPr>
+        <p:style>
+          <a:lnRef idx="1">
+            <a:schemeClr val="accent1"/>
+          </a:lnRef>
+          <a:fillRef idx="3">
+            <a:schemeClr val="accent1"/>
+          </a:fillRef>
+          <a:effectRef idx="2">
+            <a:schemeClr val="accent1"/>
+          </a:effectRef>
+          <a:fontRef idx="minor">
+            <a:schemeClr val="lt1"/>
+          </a:fontRef>
+        </p:style>
+        <p:txBody>
+          <a:bodyPr rtlCol="0" anchor="ctr"/>
+          <a:lstStyle/>
+          <a:p>
+            <a:pPr algn="ctr"/>
+          </a:p>
+        </p:txBody>
+      </p:sp>
+      <p:sp>
+        <p:nvSpPr>
+          <p:cNvPr id="12" name="TextBox 11"/>
+          <p:cNvSpPr txBox="1"/>
+          <p:nvPr/>
+        </p:nvSpPr>
+        <p:spPr>
+          <a:xfrm>
+            <a:off x="4334256" y="941832"/>
+            <a:ext cx="3557016" cy="274320"/>
+          </a:xfrm>
+          <a:prstGeom prst="rect">
+            <a:avLst/>
+          </a:prstGeom>
+          <a:noFill/>
+        </p:spPr>
+        <p:txBody>
+          <a:bodyPr wrap="square">
+            <a:spAutoFit/>
+          </a:bodyPr>
+          <a:lstStyle/>
+          <a:p>
+            <a:pPr algn="l"/>
+            <a:r>
+              <a:rPr sz="1100" b="1">
+                <a:solidFill>
+                  <a:srgbClr val="5BB86C"/>
+                </a:solidFill>
+              </a:rPr>
+              <a:t>日次アイデアメモ（今週分）</a:t>
+            </a:r>
+          </a:p>
+        </p:txBody>
+      </p:sp>
+      <p:sp>
+        <p:nvSpPr>
+          <p:cNvPr id="13" name="TextBox 12"/>
+          <p:cNvSpPr txBox="1"/>
+          <p:nvPr/>
+        </p:nvSpPr>
+        <p:spPr>
+          <a:xfrm>
+            <a:off x="4334256" y="1280160"/>
+            <a:ext cx="3557016" cy="5349240"/>
+          </a:xfrm>
+          <a:prstGeom prst="rect">
+            <a:avLst/>
+          </a:prstGeom>
+          <a:noFill/>
+        </p:spPr>
+        <p:txBody>
+          <a:bodyPr wrap="square">
+            <a:spAutoFit/>
+          </a:bodyPr>
+          <a:lstStyle/>
+          <a:p>
+            <a:pPr algn="l"/>
+            <a:r>
+              <a:rPr sz="900" b="0">
+                <a:solidFill>
+                  <a:srgbClr val="CCCCCC"/>
+                </a:solidFill>
+              </a:rPr>
+              <a:t>（今週のアイデアメモなし）</a:t>
+            </a:r>
+          </a:p>
+        </p:txBody>
+      </p:sp>
+      <p:sp>
+        <p:nvSpPr>
+          <p:cNvPr id="14" name="Rectangle 13"/>
+          <p:cNvSpPr/>
+          <p:nvPr/>
+        </p:nvSpPr>
+        <p:spPr>
+          <a:xfrm>
+            <a:off x="8129016" y="868680"/>
+            <a:ext cx="3739896" cy="5806440"/>
+          </a:xfrm>
+          <a:prstGeom prst="rect">
+            <a:avLst/>
+          </a:prstGeom>
+          <a:solidFill>
+            <a:srgbClr val="221808"/>
+          </a:solidFill>
+          <a:ln w="19050">
+            <a:solidFill>
+              <a:srgbClr val="E89C45"/>
+            </a:solidFill>
+          </a:ln>
+        </p:spPr>
+        <p:style>
+          <a:lnRef idx="1">
+            <a:schemeClr val="accent1"/>
+          </a:lnRef>
+          <a:fillRef idx="3">
+            <a:schemeClr val="accent1"/>
+          </a:fillRef>
+          <a:effectRef idx="2">
+            <a:schemeClr val="accent1"/>
+          </a:effectRef>
+          <a:fontRef idx="minor">
+            <a:schemeClr val="lt1"/>
+          </a:fontRef>
+        </p:style>
+        <p:txBody>
+          <a:bodyPr rtlCol="0" anchor="ctr"/>
+          <a:lstStyle/>
+          <a:p>
+            <a:pPr algn="ctr"/>
+          </a:p>
+        </p:txBody>
+      </p:sp>
+      <p:sp>
+        <p:nvSpPr>
+          <p:cNvPr id="15" name="Rectangle 14"/>
+          <p:cNvSpPr/>
+          <p:nvPr/>
+        </p:nvSpPr>
+        <p:spPr>
+          <a:xfrm>
+            <a:off x="8129016" y="868680"/>
+            <a:ext cx="36576" cy="5806440"/>
+          </a:xfrm>
+          <a:prstGeom prst="rect">
+            <a:avLst/>
+          </a:prstGeom>
+          <a:solidFill>
+            <a:srgbClr val="E89C45"/>
+          </a:solidFill>
+          <a:ln>
+            <a:noFill/>
+          </a:ln>
+        </p:spPr>
+        <p:style>
+          <a:lnRef idx="1">
+            <a:schemeClr val="accent1"/>
+          </a:lnRef>
+          <a:fillRef idx="3">
+            <a:schemeClr val="accent1"/>
+          </a:fillRef>
+          <a:effectRef idx="2">
+            <a:schemeClr val="accent1"/>
+          </a:effectRef>
+          <a:fontRef idx="minor">
+            <a:schemeClr val="lt1"/>
+          </a:fontRef>
+        </p:style>
+        <p:txBody>
+          <a:bodyPr rtlCol="0" anchor="ctr"/>
+          <a:lstStyle/>
+          <a:p>
+            <a:pPr algn="ctr"/>
+          </a:p>
+        </p:txBody>
+      </p:sp>
+      <p:sp>
+        <p:nvSpPr>
+          <p:cNvPr id="16" name="TextBox 15"/>
+          <p:cNvSpPr txBox="1"/>
+          <p:nvPr/>
+        </p:nvSpPr>
+        <p:spPr>
+          <a:xfrm>
+            <a:off x="8238744" y="941832"/>
+            <a:ext cx="3557016" cy="274320"/>
+          </a:xfrm>
+          <a:prstGeom prst="rect">
+            <a:avLst/>
+          </a:prstGeom>
+          <a:noFill/>
+        </p:spPr>
+        <p:txBody>
+          <a:bodyPr wrap="square">
+            <a:spAutoFit/>
+          </a:bodyPr>
+          <a:lstStyle/>
+          <a:p>
+            <a:pPr algn="l"/>
+            <a:r>
+              <a:rPr sz="1100" b="1">
+                <a:solidFill>
+                  <a:srgbClr val="E89C45"/>
+                </a:solidFill>
+              </a:rPr>
+              <a:t>🔥 肉酒場 然 への活用アクション</a:t>
+            </a:r>
+          </a:p>
+        </p:txBody>
+      </p:sp>
+      <p:sp>
+        <p:nvSpPr>
+          <p:cNvPr id="17" name="TextBox 16"/>
+          <p:cNvSpPr txBox="1"/>
+          <p:nvPr/>
+        </p:nvSpPr>
+        <p:spPr>
+          <a:xfrm>
+            <a:off x="8238744" y="1280160"/>
+            <a:ext cx="3557016" cy="5349240"/>
+          </a:xfrm>
+          <a:prstGeom prst="rect">
+            <a:avLst/>
+          </a:prstGeom>
+          <a:noFill/>
+        </p:spPr>
+        <p:txBody>
+          <a:bodyPr wrap="square">
+            <a:spAutoFit/>
+          </a:bodyPr>
+          <a:lstStyle/>
+          <a:p>
+            <a:pPr algn="l"/>
+            <a:r>
+              <a:rPr sz="900" b="0">
+                <a:solidFill>
+                  <a:srgbClr val="CCCCCC"/>
+                </a:solidFill>
+              </a:rPr>
+              <a:t>▶ 【メニュー】**胡椒餅（フーチャオビン）**：「四ツ谷一餅堂」などが火付を糀漬けアレンジで検討
+▶ 【発酵】**麹（Koji）が世界的トレンドに**：ミシュランが示す2を看板メニューに応用
+▶ 【SNS】**TikTok＝新規発見の最強プラットフォーム化**：20の投稿フォーマットを参考に
+▶ 【仕込み】今週のトレンド食材を翌週の漬け込み素材に追加
+▶ 【集客】週次トレンドをInstagramストーリーズで発信</a:t>
             </a:r>
           </a:p>
         </p:txBody>
